--- a/Lesson15-MultiToolAgent/Lesson15-MultiToolAgent.pptx
+++ b/Lesson15-MultiToolAgent/Lesson15-MultiToolAgent.pptx
@@ -1303,7 +1303,7 @@
           <a:p>
             <a:r>
               <a:rPr lang="en-US" dirty="0"/>
-              <a:t>Try this on your own. Write a UnitsPlugin with one KernelFunction that converts Celsius to Fahrenheit, give it a clear Description, and register it with AddFromType under its own name. Then replace the single hard-coded request with a Console.ReadLine loop. Ask for the weather in Salt Lake City in Fahrenheit and check that both GetWeather and your new tool fire. Then ask only for the time and confirm that the model calls just GetLocalTime. Watching which trace lines appear is the easiest way to see tool selection at work.</a:t>
+              <a:t>Try this on your own. Write a UnitsPlugin in its own UnitsPlugin.cs file, next to TimePlugin.cs and WeatherPlugin.cs, with one KernelFunction that converts Celsius to Fahrenheit. Give it a clear Description, and register it with AddFromType under its own name in Program.cs. Then replace the single hard-coded request with a Console.ReadLine loop. Ask for the weather in Salt Lake City in Fahrenheit and check that both GetWeather and your new tool fire. Then ask only for the time and confirm that the model calls just GetLocalTime. Watching which trace lines appear is the easiest way to see tool selection at work.</a:t>
             </a:r>
             <a:endParaRPr lang="en-US" dirty="0"/>
           </a:p>
@@ -9483,7 +9483,7 @@
                 <a:ea typeface="Courier New" pitchFamily="34" charset="-122"/>
                 <a:cs typeface="Courier New" pitchFamily="34" charset="-120"/>
               </a:rPr>
-              <a:t>MultiToolAgent/Program.cs</a:t>
+              <a:t>MultiToolAgent/UnitsPlugin.cs</a:t>
             </a:r>
             <a:endParaRPr lang="en-US" sz="850" dirty="0"/>
           </a:p>
